--- a/dist/초5/수학/자료/초5_수학_자료_01_평균_학생용.pptx
+++ b/dist/초5/수학/자료/초5_수학_자료_01_평균_학생용.pptx
@@ -120,13 +120,13 @@
   <p:extLst>
     <p:ext uri="{521415D9-36F7-43E2-AB2F-B90AF26B5E84}">
       <p14:sectionLst xmlns:p14="http://schemas.microsoft.com/office/powerpoint/2010/main">
-        <p14:section name="도입" id="{bf537a63-12d0-a064-b83a-02587eb67ce6}">
+        <p14:section name="도입" id="{da6d4817-9976-d6e8-b56c-a89d927303b3}">
           <p14:sldIdLst>
             <p14:sldId id="256"/>
             <p14:sldId id="257"/>
           </p14:sldIdLst>
         </p14:section>
-        <p14:section name="개념" id="{f54aef90-69c3-5e4d-bab2-3f70e3a8b3cb}">
+        <p14:section name="개념" id="{7d7a3a57-acab-4058-fe90-741908b8107e}">
           <p14:sldIdLst>
             <p14:sldId id="258"/>
             <p14:sldId id="259"/>
@@ -134,7 +134,7 @@
             <p14:sldId id="264"/>
           </p14:sldIdLst>
         </p14:section>
-        <p14:section name="연습" id="{cf105a5b-dd07-0bab-bfd7-746d21967173}">
+        <p14:section name="연습" id="{35aa790a-9d99-0b84-5754-96de69eb7805}">
           <p14:sldIdLst>
             <p14:sldId id="261"/>
             <p14:sldId id="262"/>
@@ -142,24 +142,24 @@
             <p14:sldId id="265"/>
           </p14:sldIdLst>
         </p14:section>
-        <p14:section name="개념" id="{b2e88c38-33cd-74e3-6af4-4878f26476a9}">
+        <p14:section name="개념" id="{44ee9d08-946d-d30b-41f1-8125be89e63d}">
           <p14:sldIdLst/>
         </p14:section>
-        <p14:section name="연습" id="{c0732826-ed4a-6a09-0772-cc1f1add520e}">
+        <p14:section name="연습" id="{4355f7bc-9748-6dc9-7916-bceb68e58f78}">
           <p14:sldIdLst/>
         </p14:section>
-        <p14:section name="확인" id="{93809bdd-dfe4-41fe-28f6-fcb5cd9ede86}">
+        <p14:section name="확인" id="{a530340f-a70a-201e-6aac-3afd45cf1772}">
           <p14:sldIdLst>
             <p14:sldId id="266"/>
             <p14:sldId id="267"/>
           </p14:sldIdLst>
         </p14:section>
-        <p14:section name="정리" id="{15562ea5-758a-f73b-e419-d045c8d69048}">
+        <p14:section name="정리" id="{a5ca2e9d-85a3-3ea1-7af3-36828430f747}">
           <p14:sldIdLst>
             <p14:sldId id="268"/>
           </p14:sldIdLst>
         </p14:section>
-        <p14:section name="보충" id="{2fa81316-739d-c1bb-432a-616dab371eda}">
+        <p14:section name="보충" id="{858c5aa3-ca42-a201-b9bd-c61dcba25fdd}">
           <p14:sldIdLst>
             <p14:sldId id="269"/>
           </p14:sldIdLst>
@@ -4138,7 +4138,7 @@
           </p:nvPr>
         </p:nvGraphicFramePr>
         <p:xfrm>
-          <a:off x="6277356" y="3004185"/>
+          <a:off x="6277356" y="3003042"/>
           <a:ext cx="5362956" cy="914400"/>
         </p:xfrm>
         <a:graphic>
@@ -4149,7 +4149,7 @@
                 <a:gridCol w="2252442"/>
                 <a:gridCol w="3110514"/>
               </a:tblGrid>
-              <a:tr h="511810">
+              <a:tr h="512572">
                 <a:tc>
                   <a:txBody>
                     <a:bodyPr/>
@@ -4287,7 +4287,7 @@
                   </a:tcPr>
                 </a:tc>
               </a:tr>
-              <a:tr h="511810">
+              <a:tr h="512572">
                 <a:tc>
                   <a:txBody>
                     <a:bodyPr/>
@@ -4425,7 +4425,7 @@
                   </a:tcPr>
                 </a:tc>
               </a:tr>
-              <a:tr h="511810">
+              <a:tr h="512572">
                 <a:tc>
                   <a:txBody>
                     <a:bodyPr/>
@@ -16405,7 +16405,7 @@
           </p:nvPr>
         </p:nvGraphicFramePr>
         <p:xfrm>
-          <a:off x="6307074" y="3642360"/>
+          <a:off x="6307074" y="3633216"/>
           <a:ext cx="5303520" cy="914400"/>
         </p:xfrm>
         <a:graphic>
@@ -16420,7 +16420,7 @@
                 <a:gridCol w="742493"/>
                 <a:gridCol w="742493"/>
               </a:tblGrid>
-              <a:tr h="472440">
+              <a:tr h="481584">
                 <a:tc>
                   <a:txBody>
                     <a:bodyPr/>
@@ -16830,7 +16830,7 @@
                   </a:tcPr>
                 </a:tc>
               </a:tr>
-              <a:tr h="472440">
+              <a:tr h="481584">
                 <a:tc>
                   <a:txBody>
                     <a:bodyPr/>
@@ -17974,7 +17974,7 @@
           </p:nvPr>
         </p:nvGraphicFramePr>
         <p:xfrm>
-          <a:off x="1751076" y="2179574"/>
+          <a:off x="1751076" y="2178812"/>
           <a:ext cx="8686800" cy="914400"/>
         </p:xfrm>
         <a:graphic>
@@ -17988,7 +17988,7 @@
                 <a:gridCol w="1476756"/>
                 <a:gridCol w="1476756"/>
               </a:tblGrid>
-              <a:tr h="511810">
+              <a:tr h="512572">
                 <a:tc>
                   <a:txBody>
                     <a:bodyPr/>
@@ -18330,7 +18330,7 @@
                   </a:tcPr>
                 </a:tc>
               </a:tr>
-              <a:tr h="511810">
+              <a:tr h="512572">
                 <a:tc>
                   <a:txBody>
                     <a:bodyPr/>
@@ -18844,7 +18844,7 @@
           </p:nvPr>
         </p:nvGraphicFramePr>
         <p:xfrm>
-          <a:off x="6599133" y="3703320"/>
+          <a:off x="6599133" y="3689604"/>
           <a:ext cx="5041179" cy="914400"/>
         </p:xfrm>
         <a:graphic>
@@ -18855,7 +18855,7 @@
                 <a:gridCol w="2117295"/>
                 <a:gridCol w="2923884"/>
               </a:tblGrid>
-              <a:tr h="472440">
+              <a:tr h="481584">
                 <a:tc>
                   <a:txBody>
                     <a:bodyPr/>
@@ -18993,7 +18993,7 @@
                   </a:tcPr>
                 </a:tc>
               </a:tr>
-              <a:tr h="472440">
+              <a:tr h="481584">
                 <a:tc>
                   <a:txBody>
                     <a:bodyPr/>
@@ -19131,7 +19131,7 @@
                   </a:tcPr>
                 </a:tc>
               </a:tr>
-              <a:tr h="472440">
+              <a:tr h="481584">
                 <a:tc>
                   <a:txBody>
                     <a:bodyPr/>
